--- a/cs701/slides/week-01.pptx
+++ b/cs701/slides/week-01.pptx
@@ -3961,7 +3961,7 @@
                   <a:srgbClr val="01AEFD"/>
                 </a:solidFill>
               </a:rPr>
-              <a:t>Type this into MyName.java   -   line 1</a:t>
+              <a:t>Make a new file, MyName.java, and type this in   -   line 1</a:t>
             </a:r>
           </a:p>
         </p:txBody>
@@ -4042,7 +4042,7 @@
                   <a:srgbClr val="DCECEF"/>
                 </a:solidFill>
               </a:rPr>
-              <a:t>Opens the class. Its name must be the file's name without .java - MyName lives in MyName.java - and every other line goes inside its braces.</a:t>
+              <a:t>Opens the class: MyName, the file's name without .java.</a:t>
             </a:r>
           </a:p>
         </p:txBody>
@@ -9021,7 +9021,7 @@
                   <a:srgbClr val="01AEFD"/>
                 </a:solidFill>
               </a:rPr>
-              <a:t>Type this into Primitives.java   -   line 1</a:t>
+              <a:t>Make a new file, Primitives.java, and type this in   -   line 1</a:t>
             </a:r>
           </a:p>
         </p:txBody>
@@ -9102,7 +9102,7 @@
                   <a:srgbClr val="DCECEF"/>
                 </a:solidFill>
               </a:rPr>
-              <a:t>Opens the class. Its name must be the file's name without .java - Primitives lives in Primitives.java - and every other line goes inside its braces.</a:t>
+              <a:t>Opens the class: Primitives, the file's name without .java.</a:t>
             </a:r>
           </a:p>
         </p:txBody>
@@ -9326,7 +9326,7 @@
                   <a:srgbClr val="01AEFD"/>
                 </a:solidFill>
               </a:rPr>
-              <a:t>Type this into HelloWorld.java   -   line 1</a:t>
+              <a:t>Make a new file, HelloWorld.java, and type this in   -   line 1</a:t>
             </a:r>
           </a:p>
         </p:txBody>
